--- a/decks/combined-cells/combined-cells_ch3_prokaryotes-and-eukaryotes.pptx
+++ b/decks/combined-cells/combined-cells_ch3_prokaryotes-and-eukaryotes.pptx
@@ -122,48 +122,48 @@
   <p:extLst>
     <p:ext uri="{521415D9-36F7-43E2-AB2F-B90AF26B5E84}">
       <p14:sectionLst xmlns:p14="http://schemas.microsoft.com/office/powerpoint/2010/main">
-        <p14:section name="Opening" id="{6f5fda4a-e20e-3ce9-7d63-1eb08bbf54af}">
+        <p14:section name="Opening" id="{a2bb4fe8-73fc-d5f6-ae9a-8645cbaf063d}">
           <p14:sldIdLst>
             <p14:sldId id="256"/>
           </p14:sldIdLst>
         </p14:section>
-        <p14:section name="Gate" id="{186158ad-1777-4b13-27f8-9558e503d7ff}">
+        <p14:section name="Gate" id="{43b29bff-454b-b30e-97d5-702afa2cce04}">
           <p14:sldIdLst>
             <p14:sldId id="257"/>
             <p14:sldId id="258"/>
           </p14:sldIdLst>
         </p14:section>
-        <p14:section name="Pre-teach" id="{ef8450be-5aab-a3a3-5c61-6ca753dfed33}">
+        <p14:section name="Pre-teach" id="{72b8790b-d5a3-3079-d54b-3aa4d17b3d2c}">
           <p14:sldIdLst>
             <p14:sldId id="259"/>
           </p14:sldIdLst>
         </p14:section>
-        <p14:section name="Read-along" id="{8b74998d-1c1b-7053-2e78-20018f5d293d}">
+        <p14:section name="Read-along" id="{a41317ad-56c9-e1cb-4952-3a544c7d265d}">
           <p14:sldIdLst>
             <p14:sldId id="260"/>
             <p14:sldId id="261"/>
           </p14:sldIdLst>
         </p14:section>
-        <p14:section name="Teach" id="{378fc310-5844-196a-c9e9-47f4a307cbd9}">
+        <p14:section name="Teach" id="{e88c050a-7df1-590f-7b9e-f414ff201d5e}">
           <p14:sldIdLst>
             <p14:sldId id="262"/>
             <p14:sldId id="263"/>
             <p14:sldId id="264"/>
           </p14:sldIdLst>
         </p14:section>
-        <p14:section name="Routes" id="{2e9d91f4-3dd8-41f7-6f08-fea30b009a21}">
+        <p14:section name="Routes" id="{4781a4ea-b8d8-005f-cee7-e7f2810cfc77}">
           <p14:sldIdLst>
             <p14:sldId id="265"/>
             <p14:sldId id="266"/>
             <p14:sldId id="267"/>
           </p14:sldIdLst>
         </p14:section>
-        <p14:section name="Close" id="{67c69e10-da59-6edd-3a3a-713b5de0bbce}">
+        <p14:section name="Close" id="{f9ae22ec-0dc5-e4c6-64c8-e040d6dac261}">
           <p14:sldIdLst>
             <p14:sldId id="268"/>
           </p14:sldIdLst>
         </p14:section>
-        <p14:section name="Answers" id="{cbe4f672-9f86-911b-4c80-eb73a01deeef}">
+        <p14:section name="Answers" id="{d7c0a209-9dad-5ec2-325f-a47393c30616}">
           <p14:sldIdLst>
             <p14:sldId id="269"/>
             <p14:sldId id="270"/>
@@ -949,7 +949,7 @@
               <a:rPr lang="en-US" dirty="0"/>
               <a:t>Exit ticket — individual, silent, on a slip or mini-whiteboard. Recall before help: no notes, no lanes, no hints. Collect before pupils leave.
 Question: Where is the DNA in a prokaryotic cell?
-Answer: A   free in the cytoplasm as a single loop. Prokaryotes have no nucleus. Their main DNA is one large loop lying free in the cytoplasm, often with small plasmids as well.
+Answer: B   free in the cytoplasm as a single loop. Prokaryotes have no nucleus. Their main DNA is one large loop lying free in the cytoplasm, often with small plasmids as well.
 Source of this question: gate item 1 re-asked (options rotated) — this chapter has no third quick-check module.
 The ebook also holds task 3, "Built to survive", for homework or the next lesson's do now.
 Sort the slips: correct → ready to move on; incorrect → start next lesson in the pre-teach group, with the read-along and the Support lane. Same destination next time.</a:t>
@@ -1223,7 +1223,7 @@
             <a:r>
               <a:rPr lang="en-US" dirty="0"/>
               <a:t>Answers — exit ticket: Exit ticket. Reveal the answer; pupils mark their own work in a different colour, then read the "why" together. Same destination for every lane, so one answer serves the whole class.
-Answer: A   free in the cytoplasm as a single loop
+Answer: B   free in the cytoplasm as a single loop
 Why: Prokaryotes have no nucleus. Their main DNA is one large loop lying free in the cytoplasm, often with small plasmids as well.
 Ask a Support pupil to explain one step, and a Stretch pupil to share their extension.</a:t>
             </a:r>
@@ -1314,9 +1314,9 @@
             <a:r>
               <a:rPr lang="en-US" dirty="0"/>
               <a:t>Do now — retrieval. Silent, no notes, no help: recall comes before any support. Give about four minutes.
-1. Where is the DNA in a prokaryotic cell?  →  B   free in the cytoplasm as a single loop
+1. Where is the DNA in a prokaryotic cell?  →  C   free in the cytoplasm as a single loop
 2. A ___ is a small ring of extra DNA found in a bacterial cell.  →  plasmid
-3. Which of these is a prokaryote?  →  B   a bacterium
+3. Which of these is a prokaryote?  →  D   a bacterium
 Circulate: who gets 3/3 (Stretch route), 2/3 (Core), 0–1 (Support)? Use this to route pupils later in the lesson.</a:t>
             </a:r>
             <a:endParaRPr lang="en-US" dirty="0"/>
@@ -1406,9 +1406,9 @@
             <a:r>
               <a:rPr lang="en-US" dirty="0"/>
               <a:t>Answers — pupils mark their own in a different colour, then hands up for 3/3, 2/3, 1/3.
-1. B   free in the cytoplasm as a single loop. Prokaryotes have no nucleus. Their main DNA is one large loop lying free in the cytoplasm, often with small plasmids as well.
+1. C   free in the cytoplasm as a single loop. Prokaryotes have no nucleus. Their main DNA is one large loop lying free in the cytoplasm, often with small plasmids as well.
 2. plasmid. Plasmids are small rings of DNA, separate from the main loop, that can carry useful extra genes such as antibiotic resistance.
-3. B   a bacterium. Bacteria are prokaryotes: single cells with no nucleus. Yeast is a fungus, and palisade and sperm cells are plant and animal cells; all three are eukaryotic.
+3. D   a bacterium. Bacteria are prokaryotes: single cells with no nucleus. Yeast is a fungus, and palisade and sperm cells are plant and animal cells; all three are eukaryotic.
 Say the route each score points to: 3/3 Stretch, 2/3 Core, 0–1 Support. Pupils may choose to move up.</a:t>
             </a:r>
             <a:endParaRPr lang="en-US" dirty="0"/>
@@ -7406,7 +7406,7 @@
                 <a:ea typeface="Calibri" pitchFamily="34" charset="-122"/>
                 <a:cs typeface="Calibri" pitchFamily="34" charset="-120"/>
               </a:rPr>
-              <a:t>free in the cytoplasm as a single loop</a:t>
+              <a:t>inside the cell wall</a:t>
             </a:r>
             <a:endParaRPr lang="en-US" sz="2400" dirty="0"/>
           </a:p>
@@ -7443,7 +7443,7 @@
                 <a:ea typeface="Calibri" pitchFamily="34" charset="-122"/>
                 <a:cs typeface="Calibri" pitchFamily="34" charset="-120"/>
               </a:rPr>
-              <a:t>inside the mitochondria</a:t>
+              <a:t>free in the cytoplasm as a single loop</a:t>
             </a:r>
             <a:endParaRPr lang="en-US" sz="2400" dirty="0"/>
           </a:p>
@@ -7480,7 +7480,7 @@
                 <a:ea typeface="Calibri" pitchFamily="34" charset="-122"/>
                 <a:cs typeface="Calibri" pitchFamily="34" charset="-120"/>
               </a:rPr>
-              <a:t>inside the cell wall</a:t>
+              <a:t>inside the mitochondria</a:t>
             </a:r>
             <a:endParaRPr lang="en-US" sz="2400" dirty="0"/>
           </a:p>
@@ -8988,7 +8988,7 @@
                 <a:ea typeface="Cambria" pitchFamily="34" charset="-122"/>
                 <a:cs typeface="Cambria" pitchFamily="34" charset="-120"/>
               </a:rPr>
-              <a:t>A   free in the cytoplasm as a single loop</a:t>
+              <a:t>B   free in the cytoplasm as a single loop</a:t>
             </a:r>
             <a:endParaRPr lang="en-US" sz="1800" dirty="0"/>
           </a:p>
@@ -9559,7 +9559,7 @@
                 <a:ea typeface="Calibri" pitchFamily="34" charset="-122"/>
                 <a:cs typeface="Calibri" pitchFamily="34" charset="-120"/>
               </a:rPr>
-              <a:t>free in the cytoplasm as a single loop</a:t>
+              <a:t>inside the cell wall</a:t>
             </a:r>
             <a:endParaRPr lang="en-US" sz="2400" dirty="0"/>
           </a:p>
@@ -9596,7 +9596,7 @@
                 <a:ea typeface="Calibri" pitchFamily="34" charset="-122"/>
                 <a:cs typeface="Calibri" pitchFamily="34" charset="-120"/>
               </a:rPr>
-              <a:t>inside the mitochondria</a:t>
+              <a:t>free in the cytoplasm as a single loop</a:t>
             </a:r>
             <a:endParaRPr lang="en-US" sz="2400" dirty="0"/>
           </a:p>
@@ -9633,7 +9633,7 @@
                 <a:ea typeface="Calibri" pitchFamily="34" charset="-122"/>
                 <a:cs typeface="Calibri" pitchFamily="34" charset="-120"/>
               </a:rPr>
-              <a:t>inside the cell wall</a:t>
+              <a:t>inside the mitochondria</a:t>
             </a:r>
             <a:endParaRPr lang="en-US" sz="2400" dirty="0"/>
           </a:p>
@@ -10035,7 +10035,7 @@
                 <a:ea typeface="Calibri" pitchFamily="34" charset="-122"/>
                 <a:cs typeface="Calibri" pitchFamily="34" charset="-120"/>
               </a:rPr>
-              <a:t>a yeast cell</a:t>
+              <a:t>a sperm cell</a:t>
             </a:r>
             <a:endParaRPr lang="en-US" sz="2400" dirty="0"/>
           </a:p>
@@ -10072,7 +10072,7 @@
                 <a:ea typeface="Calibri" pitchFamily="34" charset="-122"/>
                 <a:cs typeface="Calibri" pitchFamily="34" charset="-120"/>
               </a:rPr>
-              <a:t>a bacterium</a:t>
+              <a:t>a yeast cell</a:t>
             </a:r>
             <a:endParaRPr lang="en-US" sz="2400" dirty="0"/>
           </a:p>
@@ -10146,7 +10146,7 @@
                 <a:ea typeface="Calibri" pitchFamily="34" charset="-122"/>
                 <a:cs typeface="Calibri" pitchFamily="34" charset="-120"/>
               </a:rPr>
-              <a:t>a sperm cell</a:t>
+              <a:t>a bacterium</a:t>
             </a:r>
             <a:endParaRPr lang="en-US" sz="2400" dirty="0"/>
           </a:p>
@@ -10547,7 +10547,7 @@
                 <a:ea typeface="Calibri" pitchFamily="34" charset="-122"/>
                 <a:cs typeface="Calibri" pitchFamily="34" charset="-120"/>
               </a:rPr>
-              <a:t>B   free in the cytoplasm as a single loop</a:t>
+              <a:t>C   free in the cytoplasm as a single loop</a:t>
             </a:r>
             <a:endParaRPr lang="en-US" sz="2200" dirty="0"/>
           </a:p>
@@ -11047,7 +11047,7 @@
                 <a:ea typeface="Calibri" pitchFamily="34" charset="-122"/>
                 <a:cs typeface="Calibri" pitchFamily="34" charset="-120"/>
               </a:rPr>
-              <a:t>B   a bacterium</a:t>
+              <a:t>D   a bacterium</a:t>
             </a:r>
             <a:endParaRPr lang="en-US" sz="2200" dirty="0"/>
           </a:p>

--- a/decks/combined-cells/combined-cells_ch3_prokaryotes-and-eukaryotes.pptx
+++ b/decks/combined-cells/combined-cells_ch3_prokaryotes-and-eukaryotes.pptx
@@ -122,48 +122,48 @@
   <p:extLst>
     <p:ext uri="{521415D9-36F7-43E2-AB2F-B90AF26B5E84}">
       <p14:sectionLst xmlns:p14="http://schemas.microsoft.com/office/powerpoint/2010/main">
-        <p14:section name="Opening" id="{a2bb4fe8-73fc-d5f6-ae9a-8645cbaf063d}">
+        <p14:section name="Opening" id="{9dc768af-25ee-e2e2-8853-fbc9fdd07b75}">
           <p14:sldIdLst>
             <p14:sldId id="256"/>
           </p14:sldIdLst>
         </p14:section>
-        <p14:section name="Gate" id="{43b29bff-454b-b30e-97d5-702afa2cce04}">
+        <p14:section name="Gate" id="{3c0d4cda-c594-7d7b-51fc-edc2085e4ee9}">
           <p14:sldIdLst>
             <p14:sldId id="257"/>
             <p14:sldId id="258"/>
           </p14:sldIdLst>
         </p14:section>
-        <p14:section name="Pre-teach" id="{72b8790b-d5a3-3079-d54b-3aa4d17b3d2c}">
+        <p14:section name="Pre-teach" id="{4dd03100-1a9e-76f5-9933-b3a3684a7727}">
           <p14:sldIdLst>
             <p14:sldId id="259"/>
           </p14:sldIdLst>
         </p14:section>
-        <p14:section name="Read-along" id="{a41317ad-56c9-e1cb-4952-3a544c7d265d}">
+        <p14:section name="Read-along" id="{accaa23b-62c0-afd9-30de-2f1e0b2149ac}">
           <p14:sldIdLst>
             <p14:sldId id="260"/>
             <p14:sldId id="261"/>
           </p14:sldIdLst>
         </p14:section>
-        <p14:section name="Teach" id="{e88c050a-7df1-590f-7b9e-f414ff201d5e}">
+        <p14:section name="Teach" id="{8418b2e4-4bb8-ee99-c397-ac3045a98b34}">
           <p14:sldIdLst>
             <p14:sldId id="262"/>
             <p14:sldId id="263"/>
             <p14:sldId id="264"/>
           </p14:sldIdLst>
         </p14:section>
-        <p14:section name="Routes" id="{4781a4ea-b8d8-005f-cee7-e7f2810cfc77}">
+        <p14:section name="Routes" id="{5d916221-b352-e6a6-957d-1295272fcd4c}">
           <p14:sldIdLst>
             <p14:sldId id="265"/>
             <p14:sldId id="266"/>
             <p14:sldId id="267"/>
           </p14:sldIdLst>
         </p14:section>
-        <p14:section name="Close" id="{f9ae22ec-0dc5-e4c6-64c8-e040d6dac261}">
+        <p14:section name="Close" id="{aa2d75f5-5562-a3e5-f4a2-ce8aef499392}">
           <p14:sldIdLst>
             <p14:sldId id="268"/>
           </p14:sldIdLst>
         </p14:section>
-        <p14:section name="Answers" id="{d7c0a209-9dad-5ec2-325f-a47393c30616}">
+        <p14:section name="Answers" id="{5f812027-a3d2-1b02-2395-823b86b5f984}">
           <p14:sldIdLst>
             <p14:sldId id="269"/>
             <p14:sldId id="270"/>
